--- a/tests/fixtures/good_theme.pptx
+++ b/tests/fixtures/good_theme.pptx
@@ -102,7 +102,26 @@
       </a:folHlink>
     </a:clrScheme>
     <a:fontScheme name="F"/>
-    <a:fmtScheme name="S"/>
+    <a:fmtScheme name="S">
+      <a:fillStyleLst/>
+      <a:lnStyleLst/>
+      <a:effectStyleLst/>
+      <a:bgFillStyleLst>
+        <a:solidFill>
+          <a:schemeClr val="phClr"/>
+        </a:solidFill>
+        <a:gradFill>
+          <a:gsLst>
+            <a:gs pos="0">
+              <a:schemeClr val="phClr"/>
+            </a:gs>
+            <a:gs pos="100000">
+              <a:schemeClr val="lt1"/>
+            </a:gs>
+          </a:gsLst>
+        </a:gradFill>
+      </a:bgFillStyleLst>
+    </a:fmtScheme>
   </a:themeElements>
 </a:theme>
 </file>